--- a/ai-training-prompt-engineering/references/exercise-data/Supplier_Quality_Mock_Presentation.pptx
+++ b/ai-training-prompt-engineering/references/exercise-data/Supplier_Quality_Mock_Presentation.pptx
@@ -194,13 +194,13 @@
                 <c:formatCode>General</c:formatCode>
                 <c:ptCount val="3"/>
                 <c:pt idx="0">
-                  <c:v>0.099</c:v>
+                  <c:v>0.09858779642952305</c:v>
                 </c:pt>
                 <c:pt idx="1">
-                  <c:v>0.129</c:v>
+                  <c:v>0.12858635377320582</c:v>
                 </c:pt>
                 <c:pt idx="2">
-                  <c:v>0.349</c:v>
+                  <c:v>0.348478399659502</c:v>
                 </c:pt>
               </c:numCache>
             </c:numRef>
@@ -483,40 +483,40 @@
                 <c:formatCode>General</c:formatCode>
                 <c:ptCount val="12"/>
                 <c:pt idx="0">
-                  <c:v>0.343</c:v>
+                  <c:v>0.3427859146151449</c:v>
                 </c:pt>
                 <c:pt idx="1">
-                  <c:v>0.329</c:v>
+                  <c:v>0.32865252464893935</c:v>
                 </c:pt>
                 <c:pt idx="2">
-                  <c:v>0.176</c:v>
+                  <c:v>0.17563467986587897</c:v>
                 </c:pt>
                 <c:pt idx="3">
-                  <c:v>0.245</c:v>
+                  <c:v>0.24454860403505196</c:v>
                 </c:pt>
                 <c:pt idx="4">
-                  <c:v>0.462</c:v>
+                  <c:v>0.46156294763647937</c:v>
                 </c:pt>
                 <c:pt idx="5">
-                  <c:v>0.456</c:v>
+                  <c:v>0.45558086560364464</c:v>
                 </c:pt>
                 <c:pt idx="6">
-                  <c:v>0.208</c:v>
+                  <c:v>0.20811654526534862</c:v>
                 </c:pt>
                 <c:pt idx="7">
-                  <c:v>0.737</c:v>
+                  <c:v>0.7369432874078821</c:v>
                 </c:pt>
                 <c:pt idx="8">
-                  <c:v>0.469</c:v>
+                  <c:v>0.4692475280710575</c:v>
                 </c:pt>
                 <c:pt idx="9">
-                  <c:v>0.14</c:v>
+                  <c:v>0.13988187752564502</c:v>
                 </c:pt>
                 <c:pt idx="10">
-                  <c:v>0.145</c:v>
+                  <c:v>0.14478764478764478</c:v>
                 </c:pt>
                 <c:pt idx="11">
-                  <c:v>0.465</c:v>
+                  <c:v>0.46526054590570715</c:v>
                 </c:pt>
               </c:numCache>
             </c:numRef>
@@ -1154,7 +1154,7 @@
             <a:r>
               <a:rPr lang="en-US" dirty="0"/>
               <a:t>PURPOSE: the comparison, on one honest scale.
-TALKING POINTS: same scope for all three; totals over totals; near-equal volumes make the comparison fair. 432 total returns on 224,902 units (0.192% overall).
+TALKING POINTS: same scope for all three; totals over totals; near-equal volumes make the comparison fair. 432 total returns on 224,902 units (0.192% overall). The headline ratios: 2.7× Cardinal Metals, 3.5× Alpha Components — computed from the full-period rates.
 TRANSITION: "Is this recent, or persistent? The trend."</a:t>
             </a:r>
             <a:endParaRPr lang="en-US" dirty="0"/>
@@ -1244,7 +1244,7 @@
             <a:r>
               <a:rPr lang="en-US" dirty="0"/>
               <a:t>PURPOSE: the pattern over time, honestly framed.
-TALKING POINTS: volatile, not trending down; the April peak and the August level both sit far above the other suppliers’ full-year rates. Do NOT claim seasonality or cause from 12 points.
+TALKING POINTS: volatile, not trending down; the April 2026 peak (0.737%) and the August level (0.465%) both sit far above the other suppliers’ full-year rates. Do NOT claim seasonality or cause from 12 points.
 TRANSITION: "What we propose to do about it."</a:t>
             </a:r>
             <a:endParaRPr lang="en-US" dirty="0"/>
@@ -2002,7 +2002,7 @@
                 <a:ea typeface="Calibri" pitchFamily="34" charset="-122"/>
                 <a:cs typeface="Calibri" pitchFamily="34" charset="-120"/>
               </a:rPr>
-              <a:t>Fictional training data · verified against Course_Workbook.xlsx · period 2025-09 to 2026-08</a:t>
+              <a:t>Fictional training data · computed from Supplier_Data_Clean.csv · period 2025-09 to 2026-08</a:t>
             </a:r>
             <a:endParaRPr lang="en-US" sz="950" dirty="0"/>
           </a:p>
@@ -2073,7 +2073,7 @@
                 <a:ea typeface="Cambria" pitchFamily="34" charset="-122"/>
                 <a:cs typeface="Cambria" pitchFamily="34" charset="-120"/>
               </a:rPr>
-              <a:t>Bravo Plastics returns at almost 3× the rate of either other supplier</a:t>
+              <a:t>Bravo Plastics returns at 2.7× the next supplier's rate — and 3.5× the lowest</a:t>
             </a:r>
             <a:endParaRPr lang="en-US" sz="2600" dirty="0"/>
           </a:p>
@@ -2171,7 +2171,7 @@
                 <a:ea typeface="Calibri" pitchFamily="34" charset="-122"/>
                 <a:cs typeface="Calibri" pitchFamily="34" charset="-120"/>
               </a:rPr>
-              <a:t>Bravo Plastics — 262 returns / 75,184 shipped = 0.349%
+              <a:t>Bravo Plastics — 262 returns / 75,184 shipped = 0.348%
 </a:t>
             </a:r>
             <a:pPr indent="0" marL="0">
@@ -2264,7 +2264,7 @@
                 <a:ea typeface="Calibri" pitchFamily="34" charset="-122"/>
                 <a:cs typeface="Calibri" pitchFamily="34" charset="-120"/>
               </a:rPr>
-              <a:t>Shipment volumes are nearly equal (75.1k / 74.7k / 75.1k units), so the rate gap is not a volume artifact.</a:t>
+              <a:t>Shipment volumes are nearly equal (75.1k / 74.7k / 75.2k units), so the rate gap is not a volume artifact.</a:t>
             </a:r>
             <a:endParaRPr lang="en-US" sz="1200" dirty="0"/>
           </a:p>
@@ -2303,7 +2303,7 @@
                 <a:ea typeface="Calibri" pitchFamily="34" charset="-122"/>
                 <a:cs typeface="Calibri" pitchFamily="34" charset="-120"/>
               </a:rPr>
-              <a:t>Fictional training data · verified against Course_Workbook.xlsx (144 detail rows) · period 2025-09 to 2026-08</a:t>
+              <a:t>Fictional training data · computed from Supplier_Data_Clean.csv (144 detail rows) · period 2025-09 to 2026-08</a:t>
             </a:r>
             <a:endParaRPr lang="en-US" sz="950" dirty="0"/>
           </a:p>
@@ -2413,7 +2413,7 @@
                 <a:ea typeface="Cambria" pitchFamily="34" charset="-122"/>
                 <a:cs typeface="Cambria" pitchFamily="34" charset="-120"/>
               </a:rPr>
-              <a:t>Bravo’s return rate is elevated and volatile — no sign of steady improvement</a:t>
+              <a:t>Bravo Plastics’ return rate is elevated and volatile — no sign of steady improvement</a:t>
             </a:r>
             <a:endParaRPr lang="en-US" sz="2600" dirty="0"/>
           </a:p>
@@ -2511,7 +2511,7 @@
                 <a:ea typeface="Calibri" pitchFamily="34" charset="-122"/>
                 <a:cs typeface="Calibri" pitchFamily="34" charset="-120"/>
               </a:rPr>
-              <a:t>Peak: 0.737% in April 2026 — about 7× Alpha’s full-year rate.
+              <a:t>Peak: 0.737% in April 2026 — about 7.5× Alpha Components’ full-year rate.
 </a:t>
             </a:r>
             <a:pPr indent="0" marL="0">
@@ -2586,7 +2586,7 @@
                 <a:ea typeface="Calibri" pitchFamily="34" charset="-122"/>
                 <a:cs typeface="Calibri" pitchFamily="34" charset="-120"/>
               </a:rPr>
-              <a:t>Fictional training data · verified against Course_Workbook.xlsx (144 detail rows) · period 2025-09 to 2026-08</a:t>
+              <a:t>Fictional training data · computed from Supplier_Data_Clean.csv (144 detail rows) · period 2025-09 to 2026-08</a:t>
             </a:r>
             <a:endParaRPr lang="en-US" sz="950" dirty="0"/>
           </a:p>
@@ -2775,7 +2775,7 @@
                 <a:ea typeface="Calibri" pitchFamily="34" charset="-122"/>
                 <a:cs typeface="Calibri" pitchFamily="34" charset="-120"/>
               </a:rPr>
-              <a:t>• Bravo’s return rate (0.349%) is ~2.7× Cardinal’s and ~3.5× Alpha’s over the same 12 months and sites.
+              <a:t>• Bravo Plastics’ return rate (0.348%) is 2.7× Cardinal Metals’ and 3.5× Alpha Components’ over the same 12 months and sites.
 </a:t>
             </a:r>
             <a:pPr indent="0" marL="0">
@@ -2811,7 +2811,7 @@
                 <a:ea typeface="Calibri" pitchFamily="34" charset="-122"/>
                 <a:cs typeface="Calibri" pitchFamily="34" charset="-120"/>
               </a:rPr>
-              <a:t>• Bravo also drives 1,157 of 2,207 inspection defect occurrences — a separate measure, reported separately.
+              <a:t>• Bravo Plastics also drives 1,157 of 2,207 inspection defect occurrences — a separate measure, reported separately.
 </a:t>
             </a:r>
             <a:endParaRPr lang="en-US" sz="1300" dirty="0"/>
@@ -2891,7 +2891,7 @@
                 <a:ea typeface="Calibri" pitchFamily="34" charset="-122"/>
                 <a:cs typeface="Calibri" pitchFamily="34" charset="-120"/>
               </a:rPr>
-              <a:t>1. Ask Bravo for a returns root-cause review on the highest-return months (Jan–Feb, Apr–May, Aug 2026).
+              <a:t>1. Ask Bravo Plastics for a returns root-cause review on the highest-return months (Jan 2026, Feb 2026, Apr 2026, May 2026, Aug 2026).
 </a:t>
             </a:r>
             <a:pPr indent="0" marL="0">
@@ -2981,7 +2981,7 @@
                 <a:ea typeface="Calibri" pitchFamily="34" charset="-122"/>
                 <a:cs typeface="Calibri" pitchFamily="34" charset="-120"/>
               </a:rPr>
-              <a:t>Fictional training data · verified against Course_Workbook.xlsx (144 detail rows) · period 2025-09 to 2026-08</a:t>
+              <a:t>Fictional training data · computed from Supplier_Data_Clean.csv (144 detail rows) · period 2025-09 to 2026-08</a:t>
             </a:r>
             <a:endParaRPr lang="en-US" sz="950" dirty="0"/>
           </a:p>
@@ -3570,7 +3570,7 @@
                 <a:ea typeface="Calibri" pitchFamily="34" charset="-122"/>
                 <a:cs typeface="Calibri" pitchFamily="34" charset="-120"/>
               </a:rPr>
-              <a:t>Fictional training data · verified against Course_Workbook.xlsx (144 detail rows) · period 2025-09 to 2026-08</a:t>
+              <a:t>Fictional training data · computed from Supplier_Data_Clean.csv (144 detail rows) · period 2025-09 to 2026-08</a:t>
             </a:r>
             <a:endParaRPr lang="en-US" sz="950" dirty="0"/>
           </a:p>

--- a/ai-training-prompt-engineering/references/exercise-data/Supplier_Quality_Mock_Presentation.pptx
+++ b/ai-training-prompt-engineering/references/exercise-data/Supplier_Quality_Mock_Presentation.pptx
@@ -2264,7 +2264,7 @@
                 <a:ea typeface="Calibri" pitchFamily="34" charset="-122"/>
                 <a:cs typeface="Calibri" pitchFamily="34" charset="-120"/>
               </a:rPr>
-              <a:t>Shipment volumes are nearly equal (75.1k / 74.7k / 75.2k units), so the rate gap is not a volume artifact.</a:t>
+              <a:t>Shipment volumes are nearly equal (Bravo 75.2k / Cardinal 74.7k / Alpha 75.1k units), so the rate gap is not a volume artifact.</a:t>
             </a:r>
             <a:endParaRPr lang="en-US" sz="1200" dirty="0"/>
           </a:p>
